--- a/(6.19) 퀘스트의 조건.pptx
+++ b/(6.19) 퀘스트의 조건.pptx
@@ -35,8 +35,8 @@
     <p:sldId id="277" r:id="rId29"/>
     <p:sldId id="288" r:id="rId30"/>
     <p:sldId id="278" r:id="rId31"/>
-    <p:sldId id="290" r:id="rId32"/>
-    <p:sldId id="291" r:id="rId33"/>
+    <p:sldId id="291" r:id="rId32"/>
+    <p:sldId id="290" r:id="rId33"/>
   </p:sldIdLst>
   <p:sldSz cx="12192000" cy="6858000"/>
   <p:notesSz cx="6858000" cy="9144000"/>
@@ -274,7 +274,7 @@
           <a:p>
             <a:fld id="{2DB8DBEE-582D-4029-8A24-5D9C92B77947}" type="datetimeFigureOut">
               <a:rPr lang="ko-KR" altLang="en-US" smtClean="0"/>
-              <a:t>2026-06-19</a:t>
+              <a:t>2026-06-22</a:t>
             </a:fld>
             <a:endParaRPr lang="ko-KR" altLang="en-US"/>
           </a:p>
@@ -444,7 +444,7 @@
           <a:p>
             <a:fld id="{2DB8DBEE-582D-4029-8A24-5D9C92B77947}" type="datetimeFigureOut">
               <a:rPr lang="ko-KR" altLang="en-US" smtClean="0"/>
-              <a:t>2026-06-19</a:t>
+              <a:t>2026-06-22</a:t>
             </a:fld>
             <a:endParaRPr lang="ko-KR" altLang="en-US"/>
           </a:p>
@@ -624,7 +624,7 @@
           <a:p>
             <a:fld id="{2DB8DBEE-582D-4029-8A24-5D9C92B77947}" type="datetimeFigureOut">
               <a:rPr lang="ko-KR" altLang="en-US" smtClean="0"/>
-              <a:t>2026-06-19</a:t>
+              <a:t>2026-06-22</a:t>
             </a:fld>
             <a:endParaRPr lang="ko-KR" altLang="en-US"/>
           </a:p>
@@ -794,7 +794,7 @@
           <a:p>
             <a:fld id="{2DB8DBEE-582D-4029-8A24-5D9C92B77947}" type="datetimeFigureOut">
               <a:rPr lang="ko-KR" altLang="en-US" smtClean="0"/>
-              <a:t>2026-06-19</a:t>
+              <a:t>2026-06-22</a:t>
             </a:fld>
             <a:endParaRPr lang="ko-KR" altLang="en-US"/>
           </a:p>
@@ -1040,7 +1040,7 @@
           <a:p>
             <a:fld id="{2DB8DBEE-582D-4029-8A24-5D9C92B77947}" type="datetimeFigureOut">
               <a:rPr lang="ko-KR" altLang="en-US" smtClean="0"/>
-              <a:t>2026-06-19</a:t>
+              <a:t>2026-06-22</a:t>
             </a:fld>
             <a:endParaRPr lang="ko-KR" altLang="en-US"/>
           </a:p>
@@ -1272,7 +1272,7 @@
           <a:p>
             <a:fld id="{2DB8DBEE-582D-4029-8A24-5D9C92B77947}" type="datetimeFigureOut">
               <a:rPr lang="ko-KR" altLang="en-US" smtClean="0"/>
-              <a:t>2026-06-19</a:t>
+              <a:t>2026-06-22</a:t>
             </a:fld>
             <a:endParaRPr lang="ko-KR" altLang="en-US"/>
           </a:p>
@@ -1639,7 +1639,7 @@
           <a:p>
             <a:fld id="{2DB8DBEE-582D-4029-8A24-5D9C92B77947}" type="datetimeFigureOut">
               <a:rPr lang="ko-KR" altLang="en-US" smtClean="0"/>
-              <a:t>2026-06-19</a:t>
+              <a:t>2026-06-22</a:t>
             </a:fld>
             <a:endParaRPr lang="ko-KR" altLang="en-US"/>
           </a:p>
@@ -1757,7 +1757,7 @@
           <a:p>
             <a:fld id="{2DB8DBEE-582D-4029-8A24-5D9C92B77947}" type="datetimeFigureOut">
               <a:rPr lang="ko-KR" altLang="en-US" smtClean="0"/>
-              <a:t>2026-06-19</a:t>
+              <a:t>2026-06-22</a:t>
             </a:fld>
             <a:endParaRPr lang="ko-KR" altLang="en-US"/>
           </a:p>
@@ -1852,7 +1852,7 @@
           <a:p>
             <a:fld id="{2DB8DBEE-582D-4029-8A24-5D9C92B77947}" type="datetimeFigureOut">
               <a:rPr lang="ko-KR" altLang="en-US" smtClean="0"/>
-              <a:t>2026-06-19</a:t>
+              <a:t>2026-06-22</a:t>
             </a:fld>
             <a:endParaRPr lang="ko-KR" altLang="en-US"/>
           </a:p>
@@ -2129,7 +2129,7 @@
           <a:p>
             <a:fld id="{2DB8DBEE-582D-4029-8A24-5D9C92B77947}" type="datetimeFigureOut">
               <a:rPr lang="ko-KR" altLang="en-US" smtClean="0"/>
-              <a:t>2026-06-19</a:t>
+              <a:t>2026-06-22</a:t>
             </a:fld>
             <a:endParaRPr lang="ko-KR" altLang="en-US"/>
           </a:p>
@@ -2382,7 +2382,7 @@
           <a:p>
             <a:fld id="{2DB8DBEE-582D-4029-8A24-5D9C92B77947}" type="datetimeFigureOut">
               <a:rPr lang="ko-KR" altLang="en-US" smtClean="0"/>
-              <a:t>2026-06-19</a:t>
+              <a:t>2026-06-22</a:t>
             </a:fld>
             <a:endParaRPr lang="ko-KR" altLang="en-US"/>
           </a:p>
@@ -2595,7 +2595,7 @@
           <a:p>
             <a:fld id="{2DB8DBEE-582D-4029-8A24-5D9C92B77947}" type="datetimeFigureOut">
               <a:rPr lang="ko-KR" altLang="en-US" smtClean="0"/>
-              <a:t>2026-06-19</a:t>
+              <a:t>2026-06-22</a:t>
             </a:fld>
             <a:endParaRPr lang="ko-KR" altLang="en-US"/>
           </a:p>
@@ -3760,11 +3760,7 @@
           <a:p>
             <a:r>
               <a:rPr lang="ko-KR" altLang="en-US"/>
-              <a:t>뉴비와 고인물의 갭을 줄이기 </a:t>
-            </a:r>
-            <a:r>
-              <a:rPr lang="ko-KR" altLang="en-US"/>
-              <a:t>위해서 </a:t>
+              <a:t>뉴비와 고인물의 갭을 줄이기 위해서 </a:t>
             </a:r>
             <a:r>
               <a:rPr lang="en-US" altLang="ko-KR" smtClean="0"/>
@@ -4970,11 +4966,7 @@
             <a:pPr lvl="1"/>
             <a:r>
               <a:rPr lang="ko-KR" altLang="en-US"/>
-              <a:t>지역마다 떨어지는 </a:t>
-            </a:r>
-            <a:r>
-              <a:rPr lang="ko-KR" altLang="en-US"/>
-              <a:t>옷감이 </a:t>
+              <a:t>지역마다 떨어지는 옷감이 </a:t>
             </a:r>
             <a:r>
               <a:rPr lang="ko-KR" altLang="en-US" smtClean="0"/>
@@ -5139,17 +5131,12 @@
             </a:r>
             <a:r>
               <a:rPr lang="ko-KR" altLang="en-US"/>
-              <a:t>옷감을 얻는 노가다를 하게 </a:t>
-            </a:r>
-            <a:r>
-              <a:rPr lang="ko-KR" altLang="en-US"/>
-              <a:t>된다</a:t>
+              <a:t>옷감을 얻는 노가다를 하게 된다</a:t>
             </a:r>
             <a:r>
               <a:rPr lang="en-US" altLang="ko-KR" smtClean="0"/>
               <a:t>.</a:t>
             </a:r>
-            <a:endParaRPr lang="en-US" altLang="ko-KR" smtClean="0"/>
           </a:p>
           <a:p>
             <a:endParaRPr lang="ko-KR" altLang="en-US"/>
@@ -6006,11 +5993,7 @@
             </a:r>
             <a:r>
               <a:rPr lang="ko-KR" altLang="en-US"/>
-              <a:t>커뮤니티 </a:t>
-            </a:r>
-            <a:r>
-              <a:rPr lang="ko-KR" altLang="en-US"/>
-              <a:t>영역 </a:t>
+              <a:t>커뮤니티 영역 </a:t>
             </a:r>
             <a:r>
               <a:rPr lang="en-US" altLang="ko-KR" smtClean="0"/>
@@ -6710,8 +6693,16 @@
           <a:lstStyle/>
           <a:p>
             <a:r>
-              <a:rPr lang="ko-KR" altLang="en-US" smtClean="0"/>
-              <a:t>떠오른 생각</a:t>
+              <a:rPr lang="en-US" altLang="ko-KR" smtClean="0"/>
+              <a:t>[</a:t>
+            </a:r>
+            <a:r>
+              <a:rPr lang="ko-KR" altLang="en-US" smtClean="0"/>
+              <a:t>리틀나이트메어 </a:t>
+            </a:r>
+            <a:r>
+              <a:rPr lang="en-US" altLang="ko-KR" smtClean="0"/>
+              <a:t>3]</a:t>
             </a:r>
             <a:endParaRPr lang="ko-KR" altLang="en-US"/>
           </a:p>
@@ -6729,22 +6720,51 @@
         </p:nvSpPr>
         <p:spPr/>
         <p:txBody>
-          <a:bodyPr/>
-          <a:lstStyle/>
-          <a:p>
-            <a:r>
-              <a:rPr lang="ko-KR" altLang="en-US" smtClean="0"/>
-              <a:t>심장에 주인공이 영향을 주면 변화가 일어나는 거야</a:t>
+          <a:bodyPr>
+            <a:normAutofit fontScale="92500" lnSpcReduction="20000"/>
+          </a:bodyPr>
+          <a:lstStyle/>
+          <a:p>
+            <a:r>
+              <a:rPr lang="ko-KR" altLang="en-US" smtClean="0"/>
+              <a:t>게임이 지닌 상황과 공간</a:t>
+            </a:r>
+            <a:r>
+              <a:rPr lang="en-US" altLang="ko-KR" smtClean="0"/>
+              <a:t> </a:t>
+            </a:r>
+            <a:r>
+              <a:rPr lang="ko-KR" altLang="en-US" smtClean="0"/>
+              <a:t>구성을 잘 보자</a:t>
             </a:r>
             <a:r>
               <a:rPr lang="en-US" altLang="ko-KR" smtClean="0"/>
               <a:t>.</a:t>
             </a:r>
-          </a:p>
-          <a:p>
-            <a:r>
-              <a:rPr lang="ko-KR" altLang="en-US" smtClean="0"/>
-              <a:t>그래서 폐교의 보스도 처치된 후 인간의 모습으로 잠깐 돌아왔던 거고</a:t>
+            <a:endParaRPr lang="en-US" altLang="ko-KR"/>
+          </a:p>
+          <a:p>
+            <a:endParaRPr lang="en-US" altLang="ko-KR" smtClean="0"/>
+          </a:p>
+          <a:p>
+            <a:r>
+              <a:rPr lang="ko-KR" altLang="en-US" smtClean="0"/>
+              <a:t>게임이 지닌 상황을</a:t>
+            </a:r>
+            <a:r>
+              <a:rPr lang="en-US" altLang="ko-KR" smtClean="0"/>
+              <a:t>, </a:t>
+            </a:r>
+            <a:r>
+              <a:rPr lang="ko-KR" altLang="en-US" smtClean="0"/>
+              <a:t>퀘스트의 밸런스는</a:t>
+            </a:r>
+            <a:endParaRPr lang="en-US" altLang="ko-KR" smtClean="0"/>
+          </a:p>
+          <a:p>
+            <a:r>
+              <a:rPr lang="ko-KR" altLang="en-US" smtClean="0"/>
+              <a:t>얼마의 시간 동안 보스가 행동하는 지와 관련된다</a:t>
             </a:r>
             <a:r>
               <a:rPr lang="en-US" altLang="ko-KR" smtClean="0"/>
@@ -6753,8 +6773,62 @@
           </a:p>
           <a:p>
             <a:r>
-              <a:rPr lang="ko-KR" altLang="en-US" smtClean="0"/>
-              <a:t>균열 안에서 플레이어가 친구를 구할 수 있었던 것도</a:t>
+              <a:rPr lang="en-US" altLang="ko-KR" smtClean="0"/>
+              <a:t>‘</a:t>
+            </a:r>
+            <a:r>
+              <a:rPr lang="ko-KR" altLang="en-US" smtClean="0"/>
+              <a:t>타이밍</a:t>
+            </a:r>
+            <a:r>
+              <a:rPr lang="en-US" altLang="ko-KR" smtClean="0"/>
+              <a:t>‘</a:t>
+            </a:r>
+          </a:p>
+          <a:p>
+            <a:endParaRPr lang="en-US" altLang="ko-KR"/>
+          </a:p>
+          <a:p>
+            <a:r>
+              <a:rPr lang="ko-KR" altLang="en-US" smtClean="0"/>
+              <a:t>죽지 않고 살아남은 보스는</a:t>
+            </a:r>
+            <a:r>
+              <a:rPr lang="en-US" altLang="ko-KR" smtClean="0"/>
+              <a:t>, </a:t>
+            </a:r>
+            <a:r>
+              <a:rPr lang="ko-KR" altLang="en-US" smtClean="0"/>
+              <a:t>이후의 시리즈에서 콘텐츠를 리사이클</a:t>
+            </a:r>
+            <a:r>
+              <a:rPr lang="en-US" altLang="ko-KR" smtClean="0"/>
+              <a:t>, </a:t>
+            </a:r>
+            <a:r>
+              <a:rPr lang="ko-KR" altLang="en-US" smtClean="0"/>
+              <a:t>즉</a:t>
+            </a:r>
+            <a:r>
+              <a:rPr lang="en-US" altLang="ko-KR" smtClean="0"/>
+              <a:t>, </a:t>
+            </a:r>
+            <a:r>
+              <a:rPr lang="ko-KR" altLang="en-US" smtClean="0"/>
+              <a:t>재활용할 수 있다</a:t>
+            </a:r>
+            <a:r>
+              <a:rPr lang="en-US" altLang="ko-KR" smtClean="0"/>
+              <a:t>.</a:t>
+            </a:r>
+          </a:p>
+          <a:p>
+            <a:endParaRPr lang="en-US" altLang="ko-KR"/>
+          </a:p>
+          <a:p>
+            <a:r>
+              <a:rPr lang="ko-KR" altLang="en-US" smtClean="0"/>
+              <a:t>퀘스트를 설계할 때 가장 중요한 건</a:t>
             </a:r>
             <a:r>
               <a:rPr lang="en-US" altLang="ko-KR" smtClean="0"/>
@@ -6765,50 +6839,11 @@
             </a:br>
             <a:r>
               <a:rPr lang="ko-KR" altLang="en-US" smtClean="0"/>
-              <a:t>친구에게 심폐소생술을 해서 그런 걸로 하자</a:t>
+              <a:t>플레이의 재미난 경험이 플레이어에게 기억에 남게 설계하는 것</a:t>
             </a:r>
             <a:r>
               <a:rPr lang="en-US" altLang="ko-KR" smtClean="0"/>
               <a:t>.</a:t>
-            </a:r>
-            <a:br>
-              <a:rPr lang="en-US" altLang="ko-KR" smtClean="0"/>
-            </a:br>
-            <a:r>
-              <a:rPr lang="ko-KR" altLang="en-US" smtClean="0"/>
-              <a:t>친구의 심장에 주인공의 선의가 작동한 거야</a:t>
-            </a:r>
-            <a:r>
-              <a:rPr lang="en-US" altLang="ko-KR" smtClean="0"/>
-              <a:t>.</a:t>
-            </a:r>
-          </a:p>
-          <a:p>
-            <a:endParaRPr lang="en-US" altLang="ko-KR"/>
-          </a:p>
-          <a:p>
-            <a:r>
-              <a:rPr lang="ko-KR" altLang="en-US" smtClean="0"/>
-              <a:t>마지막으로 모두를 구하고 균열을 모두 없애기 위해서는</a:t>
-            </a:r>
-            <a:r>
-              <a:rPr lang="en-US" altLang="ko-KR" smtClean="0"/>
-              <a:t/>
-            </a:r>
-            <a:br>
-              <a:rPr lang="en-US" altLang="ko-KR" smtClean="0"/>
-            </a:br>
-            <a:r>
-              <a:rPr lang="ko-KR" altLang="en-US" smtClean="0"/>
-              <a:t>주인공이 자신의 심장을 바쳐야 하는 것으로</a:t>
-            </a:r>
-            <a:r>
-              <a:rPr lang="en-US" altLang="ko-KR" smtClean="0"/>
-              <a:t>…</a:t>
-            </a:r>
-            <a:r>
-              <a:rPr lang="ko-KR" altLang="en-US" smtClean="0"/>
-              <a:t>ㅠ</a:t>
             </a:r>
             <a:endParaRPr lang="ko-KR" altLang="en-US"/>
           </a:p>
@@ -6817,7 +6852,7 @@
     </p:spTree>
     <p:extLst>
       <p:ext uri="{BB962C8B-B14F-4D97-AF65-F5344CB8AC3E}">
-        <p14:creationId xmlns:p14="http://schemas.microsoft.com/office/powerpoint/2010/main" val="1838344019"/>
+        <p14:creationId xmlns:p14="http://schemas.microsoft.com/office/powerpoint/2010/main" val="3650078197"/>
       </p:ext>
     </p:extLst>
   </p:cSld>
@@ -6860,16 +6895,8 @@
           <a:lstStyle/>
           <a:p>
             <a:r>
-              <a:rPr lang="en-US" altLang="ko-KR" smtClean="0"/>
-              <a:t>[</a:t>
-            </a:r>
-            <a:r>
-              <a:rPr lang="ko-KR" altLang="en-US" smtClean="0"/>
-              <a:t>리틀나이트메어 </a:t>
-            </a:r>
-            <a:r>
-              <a:rPr lang="en-US" altLang="ko-KR" smtClean="0"/>
-              <a:t>3]</a:t>
+              <a:rPr lang="ko-KR" altLang="en-US" smtClean="0"/>
+              <a:t>떠오른 생각</a:t>
             </a:r>
             <a:endParaRPr lang="ko-KR" altLang="en-US"/>
           </a:p>
@@ -6887,115 +6914,67 @@
         </p:nvSpPr>
         <p:spPr/>
         <p:txBody>
-          <a:bodyPr>
-            <a:normAutofit fontScale="92500" lnSpcReduction="20000"/>
-          </a:bodyPr>
-          <a:lstStyle/>
-          <a:p>
-            <a:r>
-              <a:rPr lang="ko-KR" altLang="en-US" smtClean="0"/>
-              <a:t>게임이 지닌 상황과 공간</a:t>
-            </a:r>
-            <a:r>
-              <a:rPr lang="en-US" altLang="ko-KR" smtClean="0"/>
-              <a:t> </a:t>
-            </a:r>
-            <a:r>
-              <a:rPr lang="ko-KR" altLang="en-US" smtClean="0"/>
-              <a:t>구성을 잘 보자</a:t>
+          <a:bodyPr/>
+          <a:lstStyle/>
+          <a:p>
+            <a:r>
+              <a:rPr lang="ko-KR" altLang="en-US" smtClean="0"/>
+              <a:t>심장에 주인공이 영향을 주면 변화가 일어나는 거야</a:t>
             </a:r>
             <a:r>
               <a:rPr lang="en-US" altLang="ko-KR" smtClean="0"/>
               <a:t>.</a:t>
             </a:r>
+          </a:p>
+          <a:p>
+            <a:r>
+              <a:rPr lang="ko-KR" altLang="en-US" smtClean="0"/>
+              <a:t>그래서 폐교의 보스도 처치된 후 인간의 모습으로 잠깐 돌아왔던 거고</a:t>
+            </a:r>
+            <a:r>
+              <a:rPr lang="en-US" altLang="ko-KR" smtClean="0"/>
+              <a:t>.</a:t>
+            </a:r>
+          </a:p>
+          <a:p>
+            <a:r>
+              <a:rPr lang="ko-KR" altLang="en-US" smtClean="0"/>
+              <a:t>균열 안에서 플레이어가 친구를 구할 수 있었던 것도</a:t>
+            </a:r>
+            <a:r>
+              <a:rPr lang="en-US" altLang="ko-KR" smtClean="0"/>
+              <a:t/>
+            </a:r>
+            <a:br>
+              <a:rPr lang="en-US" altLang="ko-KR" smtClean="0"/>
+            </a:br>
+            <a:r>
+              <a:rPr lang="ko-KR" altLang="en-US" smtClean="0"/>
+              <a:t>친구에게 심폐소생술을 해서 그런 걸로 하자</a:t>
+            </a:r>
+            <a:r>
+              <a:rPr lang="en-US" altLang="ko-KR" smtClean="0"/>
+              <a:t>.</a:t>
+            </a:r>
+            <a:br>
+              <a:rPr lang="en-US" altLang="ko-KR" smtClean="0"/>
+            </a:br>
+            <a:r>
+              <a:rPr lang="ko-KR" altLang="en-US" smtClean="0"/>
+              <a:t>친구의 심장에 주인공의 선의가 작동한 거야</a:t>
+            </a:r>
+            <a:r>
+              <a:rPr lang="en-US" altLang="ko-KR" smtClean="0"/>
+              <a:t>.</a:t>
+            </a:r>
+          </a:p>
+          <a:p>
             <a:endParaRPr lang="en-US" altLang="ko-KR"/>
           </a:p>
           <a:p>
-            <a:endParaRPr lang="en-US" altLang="ko-KR" smtClean="0"/>
-          </a:p>
-          <a:p>
-            <a:r>
-              <a:rPr lang="ko-KR" altLang="en-US" smtClean="0"/>
-              <a:t>게임이 지닌 상황을</a:t>
-            </a:r>
-            <a:r>
-              <a:rPr lang="en-US" altLang="ko-KR" smtClean="0"/>
-              <a:t>, </a:t>
-            </a:r>
-            <a:r>
-              <a:rPr lang="ko-KR" altLang="en-US" smtClean="0"/>
-              <a:t>퀘스트의 밸런스는</a:t>
-            </a:r>
-            <a:endParaRPr lang="en-US" altLang="ko-KR" smtClean="0"/>
-          </a:p>
-          <a:p>
-            <a:r>
-              <a:rPr lang="ko-KR" altLang="en-US" smtClean="0"/>
-              <a:t>얼마의 시간 동안 보스가 행동하는 지와 관련된다</a:t>
-            </a:r>
-            <a:r>
-              <a:rPr lang="en-US" altLang="ko-KR" smtClean="0"/>
-              <a:t>.</a:t>
-            </a:r>
-          </a:p>
-          <a:p>
-            <a:r>
-              <a:rPr lang="en-US" altLang="ko-KR" smtClean="0"/>
-              <a:t>‘</a:t>
-            </a:r>
-            <a:r>
-              <a:rPr lang="ko-KR" altLang="en-US" smtClean="0"/>
-              <a:t>타이밍</a:t>
-            </a:r>
-            <a:r>
-              <a:rPr lang="en-US" altLang="ko-KR" smtClean="0"/>
-              <a:t>‘</a:t>
-            </a:r>
-          </a:p>
-          <a:p>
-            <a:endParaRPr lang="en-US" altLang="ko-KR"/>
-          </a:p>
-          <a:p>
-            <a:r>
-              <a:rPr lang="ko-KR" altLang="en-US" smtClean="0"/>
-              <a:t>죽지 않고 살아남은 보스는</a:t>
-            </a:r>
-            <a:r>
-              <a:rPr lang="en-US" altLang="ko-KR" smtClean="0"/>
-              <a:t>, </a:t>
-            </a:r>
-            <a:r>
-              <a:rPr lang="ko-KR" altLang="en-US" smtClean="0"/>
-              <a:t>이후의 시리즈에서 콘텐츠를 리사이클</a:t>
-            </a:r>
-            <a:r>
-              <a:rPr lang="en-US" altLang="ko-KR" smtClean="0"/>
-              <a:t>, </a:t>
-            </a:r>
-            <a:r>
-              <a:rPr lang="ko-KR" altLang="en-US" smtClean="0"/>
-              <a:t>즉</a:t>
-            </a:r>
-            <a:r>
-              <a:rPr lang="en-US" altLang="ko-KR" smtClean="0"/>
-              <a:t>, </a:t>
-            </a:r>
-            <a:r>
-              <a:rPr lang="ko-KR" altLang="en-US" smtClean="0"/>
-              <a:t>재활용할 수 있다</a:t>
-            </a:r>
-            <a:r>
-              <a:rPr lang="en-US" altLang="ko-KR" smtClean="0"/>
-              <a:t>.</a:t>
-            </a:r>
-          </a:p>
-          <a:p>
-            <a:endParaRPr lang="en-US" altLang="ko-KR"/>
-          </a:p>
-          <a:p>
-            <a:r>
-              <a:rPr lang="ko-KR" altLang="en-US" smtClean="0"/>
-              <a:t>퀘스트를 설계할 때 가장 중요한 건</a:t>
+            <a:r>
+              <a:rPr lang="ko-KR" altLang="en-US" smtClean="0"/>
+              <a:t>마지막으로 모두를 구하고 균열을 모두 없애기 위해서는</a:t>
             </a:r>
             <a:r>
               <a:rPr lang="en-US" altLang="ko-KR" smtClean="0"/>
@@ -7006,11 +6985,15 @@
             </a:br>
             <a:r>
               <a:rPr lang="ko-KR" altLang="en-US" smtClean="0"/>
-              <a:t>플레이의 재미난 경험이 플레이어에게 기억에 남게 설계하는 것</a:t>
-            </a:r>
-            <a:r>
-              <a:rPr lang="en-US" altLang="ko-KR" smtClean="0"/>
-              <a:t>.</a:t>
+              <a:t>주인공이 자신의 심장을 바쳐야 하는 것으로</a:t>
+            </a:r>
+            <a:r>
+              <a:rPr lang="en-US" altLang="ko-KR" smtClean="0"/>
+              <a:t>…</a:t>
+            </a:r>
+            <a:r>
+              <a:rPr lang="ko-KR" altLang="en-US" smtClean="0"/>
+              <a:t>ㅠ</a:t>
             </a:r>
             <a:endParaRPr lang="ko-KR" altLang="en-US"/>
           </a:p>
@@ -7019,7 +7002,7 @@
     </p:spTree>
     <p:extLst>
       <p:ext uri="{BB962C8B-B14F-4D97-AF65-F5344CB8AC3E}">
-        <p14:creationId xmlns:p14="http://schemas.microsoft.com/office/powerpoint/2010/main" val="3650078197"/>
+        <p14:creationId xmlns:p14="http://schemas.microsoft.com/office/powerpoint/2010/main" val="1838344019"/>
       </p:ext>
     </p:extLst>
   </p:cSld>

--- a/(6.19) 퀘스트의 조건.pptx
+++ b/(6.19) 퀘스트의 조건.pptx
@@ -274,7 +274,7 @@
           <a:p>
             <a:fld id="{2DB8DBEE-582D-4029-8A24-5D9C92B77947}" type="datetimeFigureOut">
               <a:rPr lang="ko-KR" altLang="en-US" smtClean="0"/>
-              <a:t>2026-06-22</a:t>
+              <a:t>2026-06-23</a:t>
             </a:fld>
             <a:endParaRPr lang="ko-KR" altLang="en-US"/>
           </a:p>
@@ -444,7 +444,7 @@
           <a:p>
             <a:fld id="{2DB8DBEE-582D-4029-8A24-5D9C92B77947}" type="datetimeFigureOut">
               <a:rPr lang="ko-KR" altLang="en-US" smtClean="0"/>
-              <a:t>2026-06-22</a:t>
+              <a:t>2026-06-23</a:t>
             </a:fld>
             <a:endParaRPr lang="ko-KR" altLang="en-US"/>
           </a:p>
@@ -624,7 +624,7 @@
           <a:p>
             <a:fld id="{2DB8DBEE-582D-4029-8A24-5D9C92B77947}" type="datetimeFigureOut">
               <a:rPr lang="ko-KR" altLang="en-US" smtClean="0"/>
-              <a:t>2026-06-22</a:t>
+              <a:t>2026-06-23</a:t>
             </a:fld>
             <a:endParaRPr lang="ko-KR" altLang="en-US"/>
           </a:p>
@@ -794,7 +794,7 @@
           <a:p>
             <a:fld id="{2DB8DBEE-582D-4029-8A24-5D9C92B77947}" type="datetimeFigureOut">
               <a:rPr lang="ko-KR" altLang="en-US" smtClean="0"/>
-              <a:t>2026-06-22</a:t>
+              <a:t>2026-06-23</a:t>
             </a:fld>
             <a:endParaRPr lang="ko-KR" altLang="en-US"/>
           </a:p>
@@ -1040,7 +1040,7 @@
           <a:p>
             <a:fld id="{2DB8DBEE-582D-4029-8A24-5D9C92B77947}" type="datetimeFigureOut">
               <a:rPr lang="ko-KR" altLang="en-US" smtClean="0"/>
-              <a:t>2026-06-22</a:t>
+              <a:t>2026-06-23</a:t>
             </a:fld>
             <a:endParaRPr lang="ko-KR" altLang="en-US"/>
           </a:p>
@@ -1272,7 +1272,7 @@
           <a:p>
             <a:fld id="{2DB8DBEE-582D-4029-8A24-5D9C92B77947}" type="datetimeFigureOut">
               <a:rPr lang="ko-KR" altLang="en-US" smtClean="0"/>
-              <a:t>2026-06-22</a:t>
+              <a:t>2026-06-23</a:t>
             </a:fld>
             <a:endParaRPr lang="ko-KR" altLang="en-US"/>
           </a:p>
@@ -1639,7 +1639,7 @@
           <a:p>
             <a:fld id="{2DB8DBEE-582D-4029-8A24-5D9C92B77947}" type="datetimeFigureOut">
               <a:rPr lang="ko-KR" altLang="en-US" smtClean="0"/>
-              <a:t>2026-06-22</a:t>
+              <a:t>2026-06-23</a:t>
             </a:fld>
             <a:endParaRPr lang="ko-KR" altLang="en-US"/>
           </a:p>
@@ -1757,7 +1757,7 @@
           <a:p>
             <a:fld id="{2DB8DBEE-582D-4029-8A24-5D9C92B77947}" type="datetimeFigureOut">
               <a:rPr lang="ko-KR" altLang="en-US" smtClean="0"/>
-              <a:t>2026-06-22</a:t>
+              <a:t>2026-06-23</a:t>
             </a:fld>
             <a:endParaRPr lang="ko-KR" altLang="en-US"/>
           </a:p>
@@ -1852,7 +1852,7 @@
           <a:p>
             <a:fld id="{2DB8DBEE-582D-4029-8A24-5D9C92B77947}" type="datetimeFigureOut">
               <a:rPr lang="ko-KR" altLang="en-US" smtClean="0"/>
-              <a:t>2026-06-22</a:t>
+              <a:t>2026-06-23</a:t>
             </a:fld>
             <a:endParaRPr lang="ko-KR" altLang="en-US"/>
           </a:p>
@@ -2129,7 +2129,7 @@
           <a:p>
             <a:fld id="{2DB8DBEE-582D-4029-8A24-5D9C92B77947}" type="datetimeFigureOut">
               <a:rPr lang="ko-KR" altLang="en-US" smtClean="0"/>
-              <a:t>2026-06-22</a:t>
+              <a:t>2026-06-23</a:t>
             </a:fld>
             <a:endParaRPr lang="ko-KR" altLang="en-US"/>
           </a:p>
@@ -2382,7 +2382,7 @@
           <a:p>
             <a:fld id="{2DB8DBEE-582D-4029-8A24-5D9C92B77947}" type="datetimeFigureOut">
               <a:rPr lang="ko-KR" altLang="en-US" smtClean="0"/>
-              <a:t>2026-06-22</a:t>
+              <a:t>2026-06-23</a:t>
             </a:fld>
             <a:endParaRPr lang="ko-KR" altLang="en-US"/>
           </a:p>
@@ -2595,7 +2595,7 @@
           <a:p>
             <a:fld id="{2DB8DBEE-582D-4029-8A24-5D9C92B77947}" type="datetimeFigureOut">
               <a:rPr lang="ko-KR" altLang="en-US" smtClean="0"/>
-              <a:t>2026-06-22</a:t>
+              <a:t>2026-06-23</a:t>
             </a:fld>
             <a:endParaRPr lang="ko-KR" altLang="en-US"/>
           </a:p>
@@ -4302,7 +4302,7 @@
             </a:r>
             <a:r>
               <a:rPr lang="en-US" altLang="ko-KR" smtClean="0"/>
-              <a:t>＇</a:t>
+              <a:t>’</a:t>
             </a:r>
             <a:r>
               <a:rPr lang="ko-KR" altLang="en-US" smtClean="0"/>
@@ -6049,7 +6049,7 @@
             </a:r>
             <a:r>
               <a:rPr lang="en-US" altLang="ko-KR" smtClean="0"/>
-              <a:t>＇</a:t>
+              <a:t>’</a:t>
             </a:r>
             <a:r>
               <a:rPr lang="ko-KR" altLang="en-US" smtClean="0"/>
